--- a/Slides/QLS-MiCM_IntroToPython.pptx
+++ b/Slides/QLS-MiCM_IntroToPython.pptx
@@ -224,7 +224,7 @@
           <a:p>
             <a:fld id="{9FF74AA5-8A3E-4FDB-94BB-BF4B31CB4E38}" type="datetimeFigureOut">
               <a:rPr lang="en-CA" smtClean="0"/>
-              <a:t>2026-02-13</a:t>
+              <a:t>2026-05-30</a:t>
             </a:fld>
             <a:endParaRPr lang="en-CA"/>
           </a:p>
@@ -401,7 +401,7 @@
           <a:p>
             <a:fld id="{217E5156-1B5D-054E-B5B2-E1B1BA160252}" type="datetimeFigureOut">
               <a:rPr lang="fr-FR" smtClean="0"/>
-              <a:t>13/02/2026</a:t>
+              <a:t>30/05/2026</a:t>
             </a:fld>
             <a:endParaRPr lang="fr-FR"/>
           </a:p>
@@ -3445,15 +3445,46 @@
         </p:nvPicPr>
         <p:blipFill>
           <a:blip r:embed="rId3"/>
+          <a:srcRect t="79517"/>
           <a:stretch>
             <a:fillRect/>
           </a:stretch>
         </p:blipFill>
         <p:spPr>
           <a:xfrm>
-            <a:off x="2723515" y="1690688"/>
-            <a:ext cx="3358787" cy="4198484"/>
+            <a:off x="2723513" y="4833258"/>
+            <a:ext cx="3358787" cy="859972"/>
           </a:xfrm>
+        </p:spPr>
+      </p:pic>
+      <p:pic>
+        <p:nvPicPr>
+          <p:cNvPr id="4" name="Picture 3">
+            <a:extLst>
+              <a:ext uri="{FF2B5EF4-FFF2-40B4-BE49-F238E27FC236}">
+                <a16:creationId xmlns:a16="http://schemas.microsoft.com/office/drawing/2014/main" id="{FF40EFEC-7C77-DA3F-6900-AEF0D282E52C}"/>
+              </a:ext>
+            </a:extLst>
+          </p:cNvPr>
+          <p:cNvPicPr>
+            <a:picLocks noChangeAspect="1"/>
+          </p:cNvPicPr>
+          <p:nvPr/>
+        </p:nvPicPr>
+        <p:blipFill>
+          <a:blip r:embed="rId4"/>
+          <a:stretch>
+            <a:fillRect/>
+          </a:stretch>
+        </p:blipFill>
+        <p:spPr>
+          <a:xfrm>
+            <a:off x="2646679" y="1516743"/>
+            <a:ext cx="3512457" cy="3512457"/>
+          </a:xfrm>
+          <a:prstGeom prst="rect">
+            <a:avLst/>
+          </a:prstGeom>
         </p:spPr>
       </p:pic>
     </p:spTree>
@@ -3466,13 +3497,13 @@
   <p:clrMapOvr>
     <a:masterClrMapping/>
   </p:clrMapOvr>
-  <mc:AlternateContent xmlns:mc="http://schemas.openxmlformats.org/markup-compatibility/2006">
-    <mc:Choice xmlns:p159="http://schemas.microsoft.com/office/powerpoint/2015/09/main" Requires="p159">
+  <mc:AlternateContent xmlns:mc="http://schemas.openxmlformats.org/markup-compatibility/2006" xmlns:p159="http://schemas.microsoft.com/office/powerpoint/2015/09/main">
+    <mc:Choice Requires="p159">
       <p:transition xmlns:p14="http://schemas.microsoft.com/office/powerpoint/2010/main" spd="slow" p14:dur="2000">
         <p159:morph option="byObject"/>
       </p:transition>
     </mc:Choice>
-    <mc:Fallback>
+    <mc:Fallback xmlns="">
       <p:transition spd="slow">
         <p:fade/>
       </p:transition>
@@ -3929,10 +3960,10 @@
       </p:sp>
       <p:pic>
         <p:nvPicPr>
-          <p:cNvPr id="2" name="Picture 1">
+          <p:cNvPr id="3" name="Picture 2">
             <a:extLst>
               <a:ext uri="{FF2B5EF4-FFF2-40B4-BE49-F238E27FC236}">
-                <a16:creationId xmlns:a16="http://schemas.microsoft.com/office/drawing/2014/main" id="{6C69662F-A1C2-FE8A-835A-B5EA24525124}"/>
+                <a16:creationId xmlns:a16="http://schemas.microsoft.com/office/drawing/2014/main" id="{840DDA1F-307C-79CD-354A-3350483E794D}"/>
               </a:ext>
             </a:extLst>
           </p:cNvPr>
@@ -3949,8 +3980,8 @@
         </p:blipFill>
         <p:spPr>
           <a:xfrm>
-            <a:off x="685800" y="2386087"/>
-            <a:ext cx="7772400" cy="2426304"/>
+            <a:off x="314610" y="2671985"/>
+            <a:ext cx="8514780" cy="2346593"/>
           </a:xfrm>
           <a:prstGeom prst="rect">
             <a:avLst/>

--- a/Slides/QLS-MiCM_IntroToPython.pptx
+++ b/Slides/QLS-MiCM_IntroToPython.pptx
@@ -3273,7 +3273,7 @@
         <p:spPr>
           <a:xfrm>
             <a:off x="80296" y="5613781"/>
-            <a:ext cx="3567878" cy="923330"/>
+            <a:ext cx="3567878" cy="646331"/>
           </a:xfrm>
           <a:prstGeom prst="rect">
             <a:avLst/>
@@ -3298,15 +3298,7 @@
               <a:rPr lang="en-CA" sz="1800" dirty="0">
                 <a:latin typeface="Helvetica Light"/>
               </a:rPr>
-              <a:t>Facilitator: James Randolph</a:t>
-            </a:r>
-          </a:p>
-          <a:p>
-            <a:r>
-              <a:rPr lang="en-CA" sz="1800" dirty="0">
-                <a:latin typeface="Helvetica Light"/>
-              </a:rPr>
-              <a:t>February 18, 2026</a:t>
+              <a:t>June 3, 2026</a:t>
             </a:r>
             <a:endParaRPr lang="en-CA" dirty="0">
               <a:latin typeface="Helvetica Light"/>
